--- a/ViT.pptx
+++ b/ViT.pptx
@@ -9,6 +9,7 @@
     <p:sldId id="257" r:id="rId3"/>
     <p:sldId id="259" r:id="rId4"/>
     <p:sldId id="258" r:id="rId5"/>
+    <p:sldId id="260" r:id="rId6"/>
   </p:sldIdLst>
   <p:sldSz cx="12192000" cy="6858000"/>
   <p:notesSz cx="6858000" cy="9144000"/>
@@ -107,6 +108,11 @@
       </a:defRPr>
     </a:lvl9pPr>
   </p:defaultTextStyle>
+  <p:extLst>
+    <p:ext uri="{EFAFB233-063F-42B5-8137-9DF3F51BA10A}">
+      <p15:sldGuideLst xmlns:p15="http://schemas.microsoft.com/office/powerpoint/2012/main"/>
+    </p:ext>
+  </p:extLst>
 </p:presentation>
 </file>
 
@@ -257,7 +263,7 @@
           <a:p>
             <a:fld id="{7D3D135E-06B3-4107-8834-EEECA44D1432}" type="datetimeFigureOut">
               <a:rPr lang="ko-KR" altLang="en-US" smtClean="0"/>
-              <a:t>2026-08-18</a:t>
+              <a:t>2026-08-20</a:t>
             </a:fld>
             <a:endParaRPr lang="ko-KR" altLang="en-US"/>
           </a:p>
@@ -455,7 +461,7 @@
           <a:p>
             <a:fld id="{7D3D135E-06B3-4107-8834-EEECA44D1432}" type="datetimeFigureOut">
               <a:rPr lang="ko-KR" altLang="en-US" smtClean="0"/>
-              <a:t>2026-08-18</a:t>
+              <a:t>2026-08-20</a:t>
             </a:fld>
             <a:endParaRPr lang="ko-KR" altLang="en-US"/>
           </a:p>
@@ -663,7 +669,7 @@
           <a:p>
             <a:fld id="{7D3D135E-06B3-4107-8834-EEECA44D1432}" type="datetimeFigureOut">
               <a:rPr lang="ko-KR" altLang="en-US" smtClean="0"/>
-              <a:t>2026-08-18</a:t>
+              <a:t>2026-08-20</a:t>
             </a:fld>
             <a:endParaRPr lang="ko-KR" altLang="en-US"/>
           </a:p>
@@ -861,7 +867,7 @@
           <a:p>
             <a:fld id="{7D3D135E-06B3-4107-8834-EEECA44D1432}" type="datetimeFigureOut">
               <a:rPr lang="ko-KR" altLang="en-US" smtClean="0"/>
-              <a:t>2026-08-18</a:t>
+              <a:t>2026-08-20</a:t>
             </a:fld>
             <a:endParaRPr lang="ko-KR" altLang="en-US"/>
           </a:p>
@@ -1136,7 +1142,7 @@
           <a:p>
             <a:fld id="{7D3D135E-06B3-4107-8834-EEECA44D1432}" type="datetimeFigureOut">
               <a:rPr lang="ko-KR" altLang="en-US" smtClean="0"/>
-              <a:t>2026-08-18</a:t>
+              <a:t>2026-08-20</a:t>
             </a:fld>
             <a:endParaRPr lang="ko-KR" altLang="en-US"/>
           </a:p>
@@ -1401,7 +1407,7 @@
           <a:p>
             <a:fld id="{7D3D135E-06B3-4107-8834-EEECA44D1432}" type="datetimeFigureOut">
               <a:rPr lang="ko-KR" altLang="en-US" smtClean="0"/>
-              <a:t>2026-08-18</a:t>
+              <a:t>2026-08-20</a:t>
             </a:fld>
             <a:endParaRPr lang="ko-KR" altLang="en-US"/>
           </a:p>
@@ -1813,7 +1819,7 @@
           <a:p>
             <a:fld id="{7D3D135E-06B3-4107-8834-EEECA44D1432}" type="datetimeFigureOut">
               <a:rPr lang="ko-KR" altLang="en-US" smtClean="0"/>
-              <a:t>2026-08-18</a:t>
+              <a:t>2026-08-20</a:t>
             </a:fld>
             <a:endParaRPr lang="ko-KR" altLang="en-US"/>
           </a:p>
@@ -1954,7 +1960,7 @@
           <a:p>
             <a:fld id="{7D3D135E-06B3-4107-8834-EEECA44D1432}" type="datetimeFigureOut">
               <a:rPr lang="ko-KR" altLang="en-US" smtClean="0"/>
-              <a:t>2026-08-18</a:t>
+              <a:t>2026-08-20</a:t>
             </a:fld>
             <a:endParaRPr lang="ko-KR" altLang="en-US"/>
           </a:p>
@@ -2067,7 +2073,7 @@
           <a:p>
             <a:fld id="{7D3D135E-06B3-4107-8834-EEECA44D1432}" type="datetimeFigureOut">
               <a:rPr lang="ko-KR" altLang="en-US" smtClean="0"/>
-              <a:t>2026-08-18</a:t>
+              <a:t>2026-08-20</a:t>
             </a:fld>
             <a:endParaRPr lang="ko-KR" altLang="en-US"/>
           </a:p>
@@ -2378,7 +2384,7 @@
           <a:p>
             <a:fld id="{7D3D135E-06B3-4107-8834-EEECA44D1432}" type="datetimeFigureOut">
               <a:rPr lang="ko-KR" altLang="en-US" smtClean="0"/>
-              <a:t>2026-08-18</a:t>
+              <a:t>2026-08-20</a:t>
             </a:fld>
             <a:endParaRPr lang="ko-KR" altLang="en-US"/>
           </a:p>
@@ -2666,7 +2672,7 @@
           <a:p>
             <a:fld id="{7D3D135E-06B3-4107-8834-EEECA44D1432}" type="datetimeFigureOut">
               <a:rPr lang="ko-KR" altLang="en-US" smtClean="0"/>
-              <a:t>2026-08-18</a:t>
+              <a:t>2026-08-20</a:t>
             </a:fld>
             <a:endParaRPr lang="ko-KR" altLang="en-US"/>
           </a:p>
@@ -2907,7 +2913,7 @@
           <a:p>
             <a:fld id="{7D3D135E-06B3-4107-8834-EEECA44D1432}" type="datetimeFigureOut">
               <a:rPr lang="ko-KR" altLang="en-US" smtClean="0"/>
-              <a:t>2026-08-18</a:t>
+              <a:t>2026-08-20</a:t>
             </a:fld>
             <a:endParaRPr lang="ko-KR" altLang="en-US"/>
           </a:p>
@@ -4300,8 +4306,8 @@
         </p:nvSpPr>
         <p:spPr>
           <a:xfrm>
-            <a:off x="4095338" y="4565402"/>
-            <a:ext cx="1161216" cy="153888"/>
+            <a:off x="4095338" y="4488458"/>
+            <a:ext cx="1161216" cy="307777"/>
           </a:xfrm>
           <a:prstGeom prst="rect">
             <a:avLst/>
@@ -4345,6 +4351,16 @@
                 <a:latin typeface="Consolas" panose="020B0609020204030204" pitchFamily="49" charset="0"/>
               </a:rPr>
               <a:t>① 패치로 자르기</a:t>
+            </a:r>
+            <a:r>
+              <a:rPr lang="en-US" altLang="ko-KR" sz="1000" b="0" i="0" dirty="0">
+                <a:solidFill>
+                  <a:schemeClr val="tx1"/>
+                </a:solidFill>
+                <a:effectLst/>
+                <a:latin typeface="Consolas" panose="020B0609020204030204" pitchFamily="49" charset="0"/>
+              </a:rPr>
+              <a:t> (Step 2)</a:t>
             </a:r>
             <a:endParaRPr lang="ko-KR" altLang="ko-KR" sz="1000" b="0" i="0" dirty="0">
               <a:solidFill>
@@ -4604,7 +4620,7 @@
         <p:spPr>
           <a:xfrm>
             <a:off x="214831" y="3603002"/>
-            <a:ext cx="1161216" cy="153888"/>
+            <a:ext cx="1457124" cy="153888"/>
           </a:xfrm>
           <a:prstGeom prst="rect">
             <a:avLst/>
@@ -4644,6 +4660,19 @@
               </a:rPr>
               <a:t>③ CLS 토큰 추가</a:t>
             </a:r>
+            <a:r>
+              <a:rPr lang="en-US" altLang="ko-KR" sz="1000" dirty="0">
+                <a:solidFill>
+                  <a:schemeClr val="tx1"/>
+                </a:solidFill>
+              </a:rPr>
+              <a:t> (Step 4)</a:t>
+            </a:r>
+            <a:endParaRPr lang="ko-KR" altLang="ko-KR" sz="1000" dirty="0">
+              <a:solidFill>
+                <a:schemeClr val="tx1"/>
+              </a:solidFill>
+            </a:endParaRPr>
           </a:p>
         </p:txBody>
       </p:sp>
@@ -4726,7 +4755,7 @@
                   <a:schemeClr val="tx1"/>
                 </a:solidFill>
               </a:rPr>
-              <a:t>Embedding (E)</a:t>
+              <a:t>Embedding (E) (Step 3)</a:t>
             </a:r>
             <a:endParaRPr lang="ko-KR" altLang="ko-KR" dirty="0">
               <a:solidFill>
@@ -4861,8 +4890,8 @@
         </p:nvSpPr>
         <p:spPr>
           <a:xfrm>
-            <a:off x="304314" y="2531278"/>
-            <a:ext cx="1450287" cy="307777"/>
+            <a:off x="304314" y="2454334"/>
+            <a:ext cx="1450287" cy="461665"/>
           </a:xfrm>
           <a:prstGeom prst="rect">
             <a:avLst/>
@@ -4934,6 +4963,30 @@
               <a:effectLst/>
               <a:latin typeface="Consolas" panose="020B0609020204030204" pitchFamily="49" charset="0"/>
             </a:endParaRPr>
+          </a:p>
+          <a:p>
+            <a:pPr indent="0" algn="l">
+              <a:buNone/>
+            </a:pPr>
+            <a:r>
+              <a:rPr lang="en-US" altLang="ko-KR" sz="1000" dirty="0">
+                <a:solidFill>
+                  <a:schemeClr val="tx1"/>
+                </a:solidFill>
+                <a:latin typeface="Consolas" panose="020B0609020204030204" pitchFamily="49" charset="0"/>
+              </a:rPr>
+              <a:t>   </a:t>
+            </a:r>
+            <a:r>
+              <a:rPr lang="en-US" altLang="ko-KR" sz="1000" b="0" i="0" dirty="0">
+                <a:solidFill>
+                  <a:schemeClr val="tx1"/>
+                </a:solidFill>
+                <a:effectLst/>
+                <a:latin typeface="Consolas" panose="020B0609020204030204" pitchFamily="49" charset="0"/>
+              </a:rPr>
+              <a:t>(Step 5)</a:t>
+            </a:r>
           </a:p>
           <a:p>
             <a:pPr indent="0" algn="l">
@@ -5237,6 +5290,43 @@
               </a:rPr>
               <a:t> × 6회 반복</a:t>
             </a:r>
+            <a:endParaRPr lang="en-US" altLang="ko-KR" dirty="0">
+              <a:solidFill>
+                <a:schemeClr val="tx1"/>
+              </a:solidFill>
+            </a:endParaRPr>
+          </a:p>
+          <a:p>
+            <a:pPr algn="ctr"/>
+            <a:r>
+              <a:rPr lang="en-US" altLang="ko-KR" dirty="0">
+                <a:solidFill>
+                  <a:schemeClr val="tx1"/>
+                </a:solidFill>
+              </a:rPr>
+              <a:t>(Step 6</a:t>
+            </a:r>
+            <a:r>
+              <a:rPr lang="ko-KR" altLang="ko-KR" dirty="0">
+                <a:solidFill>
+                  <a:schemeClr val="tx1"/>
+                </a:solidFill>
+              </a:rPr>
+              <a:t>〮</a:t>
+            </a:r>
+            <a:r>
+              <a:rPr lang="en-US" altLang="ko-KR" dirty="0">
+                <a:solidFill>
+                  <a:schemeClr val="tx1"/>
+                </a:solidFill>
+              </a:rPr>
+              <a:t>7〮8)</a:t>
+            </a:r>
+            <a:endParaRPr lang="ko-KR" altLang="ko-KR" dirty="0">
+              <a:solidFill>
+                <a:schemeClr val="tx1"/>
+              </a:solidFill>
+            </a:endParaRPr>
           </a:p>
         </p:txBody>
       </p:sp>
@@ -5349,6 +5439,14 @@
               <a:buNone/>
             </a:pPr>
             <a:r>
+              <a:rPr lang="ko-KR" altLang="en-US" sz="1200" dirty="0">
+                <a:solidFill>
+                  <a:schemeClr val="tx1"/>
+                </a:solidFill>
+              </a:rPr>
+              <a:t>⑥ </a:t>
+            </a:r>
+            <a:r>
               <a:rPr lang="ko-KR" altLang="ko-KR" sz="1200" b="0" i="0" dirty="0">
                 <a:solidFill>
                   <a:schemeClr val="tx1"/>
@@ -5397,6 +5495,27 @@
                 <a:latin typeface="Consolas" panose="020B0609020204030204" pitchFamily="49" charset="0"/>
               </a:rPr>
               <a:t> (50개 토큰 → 1개로 압축)</a:t>
+            </a:r>
+            <a:endParaRPr lang="en-US" altLang="ko-KR" sz="1200" b="0" i="0" dirty="0">
+              <a:solidFill>
+                <a:schemeClr val="tx1"/>
+              </a:solidFill>
+              <a:effectLst/>
+              <a:latin typeface="Consolas" panose="020B0609020204030204" pitchFamily="49" charset="0"/>
+            </a:endParaRPr>
+          </a:p>
+          <a:p>
+            <a:pPr indent="0" algn="ctr">
+              <a:buNone/>
+            </a:pPr>
+            <a:r>
+              <a:rPr lang="en-US" altLang="ko-KR" sz="1200" dirty="0">
+                <a:solidFill>
+                  <a:schemeClr val="tx1"/>
+                </a:solidFill>
+                <a:latin typeface="Consolas" panose="020B0609020204030204" pitchFamily="49" charset="0"/>
+              </a:rPr>
+              <a:t>(Step 9)</a:t>
             </a:r>
             <a:endParaRPr lang="ko-KR" altLang="en-US" sz="1200" dirty="0">
               <a:solidFill>
@@ -5521,7 +5640,7 @@
                   <a:schemeClr val="tx1"/>
                 </a:solidFill>
               </a:rPr>
-              <a:t>Zl</a:t>
+              <a:t>zL</a:t>
             </a:r>
             <a:endParaRPr lang="ko-KR" altLang="ko-KR" sz="1000" dirty="0">
               <a:solidFill>
@@ -5545,8 +5664,8 @@
         </p:nvSpPr>
         <p:spPr>
           <a:xfrm>
-            <a:off x="2427759" y="533275"/>
-            <a:ext cx="1402560" cy="387166"/>
+            <a:off x="2260345" y="533275"/>
+            <a:ext cx="1747710" cy="387166"/>
           </a:xfrm>
           <a:prstGeom prst="roundRect">
             <a:avLst/>
@@ -5580,14 +5699,22 @@
           <a:p>
             <a:pPr algn="ctr"/>
             <a:r>
-              <a:rPr lang="en-US" altLang="ko-KR" dirty="0">
+              <a:rPr lang="ko-KR" altLang="en-US" sz="1200" dirty="0">
                 <a:solidFill>
                   <a:schemeClr val="tx1"/>
                 </a:solidFill>
               </a:rPr>
-              <a:t>Classifier</a:t>
-            </a:r>
-            <a:endParaRPr lang="ko-KR" altLang="en-US" dirty="0">
+              <a:t>⑦ </a:t>
+            </a:r>
+            <a:r>
+              <a:rPr lang="en-US" altLang="ko-KR" sz="1200" dirty="0">
+                <a:solidFill>
+                  <a:schemeClr val="tx1"/>
+                </a:solidFill>
+              </a:rPr>
+              <a:t>Classifier (Step 10)</a:t>
+            </a:r>
+            <a:endParaRPr lang="ko-KR" altLang="en-US" sz="1200" dirty="0">
               <a:solidFill>
                 <a:schemeClr val="tx1"/>
               </a:solidFill>
@@ -5657,7 +5784,7 @@
         <p:spPr>
           <a:xfrm flipV="1">
             <a:off x="3126118" y="920441"/>
-            <a:ext cx="2921" cy="183725"/>
+            <a:ext cx="8082" cy="183725"/>
           </a:xfrm>
           <a:prstGeom prst="straightConnector1">
             <a:avLst/>
@@ -5699,8 +5826,8 @@
         </p:nvCxnSpPr>
         <p:spPr>
           <a:xfrm flipV="1">
-            <a:off x="3129039" y="402369"/>
-            <a:ext cx="10160" cy="130906"/>
+            <a:off x="3134200" y="402369"/>
+            <a:ext cx="4999" cy="130906"/>
           </a:xfrm>
           <a:prstGeom prst="straightConnector1">
             <a:avLst/>
@@ -6000,12 +6127,12 @@
             <a:p>
               <a:pPr algn="ctr"/>
               <a:r>
-                <a:rPr lang="en-US" altLang="ko-KR" sz="1000" dirty="0" err="1">
+                <a:rPr lang="en-US" altLang="ko-KR" sz="1000" dirty="0">
                   <a:solidFill>
                     <a:schemeClr val="tx1"/>
                   </a:solidFill>
                 </a:rPr>
-                <a:t>GeLu</a:t>
+                <a:t>GELU</a:t>
               </a:r>
               <a:endParaRPr lang="ko-KR" altLang="en-US" sz="1000" dirty="0">
                 <a:solidFill>
@@ -6135,7 +6262,6 @@
                     <a:schemeClr val="tx1"/>
                   </a:solidFill>
                   <a:effectLst/>
-                  <a:latin typeface="Courier New" panose="02070309020205020404" pitchFamily="49" charset="0"/>
                 </a:rPr>
                 <a:t>FC</a:t>
               </a:r>
@@ -6149,7 +6275,6 @@
                   <a:solidFill>
                     <a:schemeClr val="tx1"/>
                   </a:solidFill>
-                  <a:latin typeface="Courier New" panose="02070309020205020404" pitchFamily="49" charset="0"/>
                 </a:rPr>
                 <a:t>(Fully Connected layer)</a:t>
               </a:r>
@@ -6158,7 +6283,6 @@
                   <a:schemeClr val="tx1"/>
                 </a:solidFill>
                 <a:effectLst/>
-                <a:latin typeface="Courier New" panose="02070309020205020404" pitchFamily="49" charset="0"/>
               </a:endParaRPr>
             </a:p>
           </p:txBody>
@@ -6372,6 +6496,300 @@
           <a:p>
             <a:pPr algn="ctr"/>
             <a:endParaRPr lang="ko-KR" altLang="en-US"/>
+          </a:p>
+        </p:txBody>
+      </p:sp>
+      <p:sp>
+        <p:nvSpPr>
+          <p:cNvPr id="4" name="직사각형 3">
+            <a:extLst>
+              <a:ext uri="{FF2B5EF4-FFF2-40B4-BE49-F238E27FC236}">
+                <a16:creationId xmlns:a16="http://schemas.microsoft.com/office/drawing/2014/main" id="{9BCAA90F-737C-C43E-7F4B-00670AD30E98}"/>
+              </a:ext>
+            </a:extLst>
+          </p:cNvPr>
+          <p:cNvSpPr/>
+          <p:nvPr/>
+        </p:nvSpPr>
+        <p:spPr>
+          <a:xfrm>
+            <a:off x="8042334" y="2013653"/>
+            <a:ext cx="3761153" cy="153888"/>
+          </a:xfrm>
+          <a:prstGeom prst="rect">
+            <a:avLst/>
+          </a:prstGeom>
+          <a:noFill/>
+          <a:ln>
+            <a:noFill/>
+          </a:ln>
+        </p:spPr>
+        <p:style>
+          <a:lnRef idx="2">
+            <a:schemeClr val="accent1">
+              <a:shade val="15000"/>
+            </a:schemeClr>
+          </a:lnRef>
+          <a:fillRef idx="1">
+            <a:schemeClr val="accent1"/>
+          </a:fillRef>
+          <a:effectRef idx="0">
+            <a:schemeClr val="accent1"/>
+          </a:effectRef>
+          <a:fontRef idx="minor">
+            <a:schemeClr val="lt1"/>
+          </a:fontRef>
+        </p:style>
+        <p:txBody>
+          <a:bodyPr wrap="square" lIns="0" tIns="0" rIns="0" bIns="0" rtlCol="0" anchor="ctr">
+            <a:spAutoFit/>
+          </a:bodyPr>
+          <a:lstStyle/>
+          <a:p>
+            <a:pPr indent="0" algn="l">
+              <a:buNone/>
+            </a:pPr>
+            <a:r>
+              <a:rPr lang="en-US" altLang="ko-KR" sz="1000" dirty="0">
+                <a:solidFill>
+                  <a:schemeClr val="tx1"/>
+                </a:solidFill>
+              </a:rPr>
+              <a:t>Step 6: Multi-Head Attention </a:t>
+            </a:r>
+            <a:r>
+              <a:rPr lang="ko-KR" altLang="en-US" sz="1000" dirty="0">
+                <a:solidFill>
+                  <a:schemeClr val="tx1"/>
+                </a:solidFill>
+              </a:rPr>
+              <a:t>확대</a:t>
+            </a:r>
+            <a:endParaRPr lang="ko-KR" altLang="ko-KR" sz="1000" b="0" i="0" dirty="0">
+              <a:solidFill>
+                <a:schemeClr val="tx1"/>
+              </a:solidFill>
+              <a:effectLst/>
+              <a:latin typeface="Courier New" panose="02070309020205020404" pitchFamily="49" charset="0"/>
+            </a:endParaRPr>
+          </a:p>
+        </p:txBody>
+      </p:sp>
+      <p:sp>
+        <p:nvSpPr>
+          <p:cNvPr id="5" name="직사각형 4">
+            <a:extLst>
+              <a:ext uri="{FF2B5EF4-FFF2-40B4-BE49-F238E27FC236}">
+                <a16:creationId xmlns:a16="http://schemas.microsoft.com/office/drawing/2014/main" id="{4DB3F503-041B-59A6-A99E-3E3A953FFAC9}"/>
+              </a:ext>
+            </a:extLst>
+          </p:cNvPr>
+          <p:cNvSpPr/>
+          <p:nvPr/>
+        </p:nvSpPr>
+        <p:spPr>
+          <a:xfrm>
+            <a:off x="6078133" y="266050"/>
+            <a:ext cx="3761153" cy="153888"/>
+          </a:xfrm>
+          <a:prstGeom prst="rect">
+            <a:avLst/>
+          </a:prstGeom>
+          <a:noFill/>
+          <a:ln>
+            <a:noFill/>
+          </a:ln>
+        </p:spPr>
+        <p:style>
+          <a:lnRef idx="2">
+            <a:schemeClr val="accent1">
+              <a:shade val="15000"/>
+            </a:schemeClr>
+          </a:lnRef>
+          <a:fillRef idx="1">
+            <a:schemeClr val="accent1"/>
+          </a:fillRef>
+          <a:effectRef idx="0">
+            <a:schemeClr val="accent1"/>
+          </a:effectRef>
+          <a:fontRef idx="minor">
+            <a:schemeClr val="lt1"/>
+          </a:fontRef>
+        </p:style>
+        <p:txBody>
+          <a:bodyPr wrap="square" lIns="0" tIns="0" rIns="0" bIns="0" rtlCol="0" anchor="ctr">
+            <a:spAutoFit/>
+          </a:bodyPr>
+          <a:lstStyle/>
+          <a:p>
+            <a:pPr indent="0" algn="l">
+              <a:buNone/>
+            </a:pPr>
+            <a:r>
+              <a:rPr lang="en-US" altLang="ko-KR" sz="1000" dirty="0">
+                <a:solidFill>
+                  <a:schemeClr val="tx1"/>
+                </a:solidFill>
+              </a:rPr>
+              <a:t>Step 7: </a:t>
+            </a:r>
+            <a:r>
+              <a:rPr lang="en-US" altLang="ko-KR" sz="1000" dirty="0" err="1">
+                <a:solidFill>
+                  <a:schemeClr val="tx1"/>
+                </a:solidFill>
+              </a:rPr>
+              <a:t>encoder_block</a:t>
+            </a:r>
+            <a:r>
+              <a:rPr lang="en-US" altLang="ko-KR" sz="1000" dirty="0">
+                <a:solidFill>
+                  <a:schemeClr val="tx1"/>
+                </a:solidFill>
+              </a:rPr>
+              <a:t> </a:t>
+            </a:r>
+            <a:r>
+              <a:rPr lang="ko-KR" altLang="en-US" sz="1000" dirty="0">
+                <a:solidFill>
+                  <a:schemeClr val="tx1"/>
+                </a:solidFill>
+              </a:rPr>
+              <a:t>전체</a:t>
+            </a:r>
+            <a:endParaRPr lang="ko-KR" altLang="ko-KR" sz="1000" b="0" i="0" dirty="0">
+              <a:solidFill>
+                <a:schemeClr val="tx1"/>
+              </a:solidFill>
+              <a:effectLst/>
+              <a:latin typeface="Courier New" panose="02070309020205020404" pitchFamily="49" charset="0"/>
+            </a:endParaRPr>
+          </a:p>
+        </p:txBody>
+      </p:sp>
+      <p:sp>
+        <p:nvSpPr>
+          <p:cNvPr id="10" name="직사각형 9">
+            <a:extLst>
+              <a:ext uri="{FF2B5EF4-FFF2-40B4-BE49-F238E27FC236}">
+                <a16:creationId xmlns:a16="http://schemas.microsoft.com/office/drawing/2014/main" id="{923E4415-A523-9F30-8D99-548898D904AA}"/>
+              </a:ext>
+            </a:extLst>
+          </p:cNvPr>
+          <p:cNvSpPr/>
+          <p:nvPr/>
+        </p:nvSpPr>
+        <p:spPr>
+          <a:xfrm>
+            <a:off x="6264706" y="1022646"/>
+            <a:ext cx="487306" cy="153888"/>
+          </a:xfrm>
+          <a:prstGeom prst="rect">
+            <a:avLst/>
+          </a:prstGeom>
+          <a:noFill/>
+          <a:ln>
+            <a:noFill/>
+          </a:ln>
+        </p:spPr>
+        <p:style>
+          <a:lnRef idx="2">
+            <a:schemeClr val="accent1">
+              <a:shade val="15000"/>
+            </a:schemeClr>
+          </a:lnRef>
+          <a:fillRef idx="1">
+            <a:schemeClr val="accent1"/>
+          </a:fillRef>
+          <a:effectRef idx="0">
+            <a:schemeClr val="accent1"/>
+          </a:effectRef>
+          <a:fontRef idx="minor">
+            <a:schemeClr val="lt1"/>
+          </a:fontRef>
+        </p:style>
+        <p:txBody>
+          <a:bodyPr wrap="square" lIns="0" tIns="0" rIns="0" bIns="0" rtlCol="0" anchor="ctr">
+            <a:spAutoFit/>
+          </a:bodyPr>
+          <a:lstStyle/>
+          <a:p>
+            <a:r>
+              <a:rPr lang="en-US" altLang="ko-KR" sz="1000" dirty="0">
+                <a:solidFill>
+                  <a:schemeClr val="tx1"/>
+                </a:solidFill>
+              </a:rPr>
+              <a:t>(L=6)</a:t>
+            </a:r>
+            <a:endParaRPr lang="ko-KR" altLang="ko-KR" sz="1000" dirty="0">
+              <a:solidFill>
+                <a:schemeClr val="tx1"/>
+              </a:solidFill>
+            </a:endParaRPr>
+          </a:p>
+        </p:txBody>
+      </p:sp>
+      <p:sp>
+        <p:nvSpPr>
+          <p:cNvPr id="12" name="직사각형 11">
+            <a:extLst>
+              <a:ext uri="{FF2B5EF4-FFF2-40B4-BE49-F238E27FC236}">
+                <a16:creationId xmlns:a16="http://schemas.microsoft.com/office/drawing/2014/main" id="{76202E55-0C07-AFF1-972A-B0F806B4174F}"/>
+              </a:ext>
+            </a:extLst>
+          </p:cNvPr>
+          <p:cNvSpPr/>
+          <p:nvPr/>
+        </p:nvSpPr>
+        <p:spPr>
+          <a:xfrm>
+            <a:off x="10590792" y="3009590"/>
+            <a:ext cx="737603" cy="153888"/>
+          </a:xfrm>
+          <a:prstGeom prst="rect">
+            <a:avLst/>
+          </a:prstGeom>
+          <a:noFill/>
+          <a:ln>
+            <a:noFill/>
+          </a:ln>
+        </p:spPr>
+        <p:style>
+          <a:lnRef idx="2">
+            <a:schemeClr val="accent1">
+              <a:shade val="15000"/>
+            </a:schemeClr>
+          </a:lnRef>
+          <a:fillRef idx="1">
+            <a:schemeClr val="accent1"/>
+          </a:fillRef>
+          <a:effectRef idx="0">
+            <a:schemeClr val="accent1"/>
+          </a:effectRef>
+          <a:fontRef idx="minor">
+            <a:schemeClr val="lt1"/>
+          </a:fontRef>
+        </p:style>
+        <p:txBody>
+          <a:bodyPr wrap="square" lIns="0" tIns="0" rIns="0" bIns="0" rtlCol="0" anchor="ctr">
+            <a:spAutoFit/>
+          </a:bodyPr>
+          <a:lstStyle/>
+          <a:p>
+            <a:r>
+              <a:rPr lang="en-US" altLang="ko-KR" sz="1000" dirty="0">
+                <a:solidFill>
+                  <a:schemeClr val="tx1"/>
+                </a:solidFill>
+              </a:rPr>
+              <a:t>(h=2)</a:t>
+            </a:r>
+            <a:endParaRPr lang="ko-KR" altLang="ko-KR" sz="1000" dirty="0">
+              <a:solidFill>
+                <a:schemeClr val="tx1"/>
+              </a:solidFill>
+            </a:endParaRPr>
           </a:p>
         </p:txBody>
       </p:sp>
@@ -6445,6 +6863,66 @@
     <p:extLst>
       <p:ext uri="{BB962C8B-B14F-4D97-AF65-F5344CB8AC3E}">
         <p14:creationId xmlns:p14="http://schemas.microsoft.com/office/powerpoint/2010/main" val="2486681800"/>
+      </p:ext>
+    </p:extLst>
+  </p:cSld>
+  <p:clrMapOvr>
+    <a:masterClrMapping/>
+  </p:clrMapOvr>
+</p:sld>
+</file>
+
+<file path=ppt/slides/slide5.xml><?xml version="1.0" encoding="utf-8"?>
+<p:sld xmlns:a="http://schemas.openxmlformats.org/drawingml/2006/main" xmlns:r="http://schemas.openxmlformats.org/officeDocument/2006/relationships" xmlns:p="http://schemas.openxmlformats.org/presentationml/2006/main">
+  <p:cSld>
+    <p:spTree>
+      <p:nvGrpSpPr>
+        <p:cNvPr id="1" name=""/>
+        <p:cNvGrpSpPr/>
+        <p:nvPr/>
+      </p:nvGrpSpPr>
+      <p:grpSpPr>
+        <a:xfrm>
+          <a:off x="0" y="0"/>
+          <a:ext cx="0" cy="0"/>
+          <a:chOff x="0" y="0"/>
+          <a:chExt cx="0" cy="0"/>
+        </a:xfrm>
+      </p:grpSpPr>
+      <p:pic>
+        <p:nvPicPr>
+          <p:cNvPr id="5" name="그림 4">
+            <a:extLst>
+              <a:ext uri="{FF2B5EF4-FFF2-40B4-BE49-F238E27FC236}">
+                <a16:creationId xmlns:a16="http://schemas.microsoft.com/office/drawing/2014/main" id="{F7375C93-E84C-E1B2-2E2E-9CD6683644E4}"/>
+              </a:ext>
+            </a:extLst>
+          </p:cNvPr>
+          <p:cNvPicPr>
+            <a:picLocks noChangeAspect="1"/>
+          </p:cNvPicPr>
+          <p:nvPr/>
+        </p:nvPicPr>
+        <p:blipFill>
+          <a:blip r:embed="rId2"/>
+          <a:stretch>
+            <a:fillRect/>
+          </a:stretch>
+        </p:blipFill>
+        <p:spPr>
+          <a:xfrm>
+            <a:off x="2258618" y="0"/>
+            <a:ext cx="7674764" cy="6858000"/>
+          </a:xfrm>
+          <a:prstGeom prst="rect">
+            <a:avLst/>
+          </a:prstGeom>
+        </p:spPr>
+      </p:pic>
+    </p:spTree>
+    <p:extLst>
+      <p:ext uri="{BB962C8B-B14F-4D97-AF65-F5344CB8AC3E}">
+        <p14:creationId xmlns:p14="http://schemas.microsoft.com/office/powerpoint/2010/main" val="2585504282"/>
       </p:ext>
     </p:extLst>
   </p:cSld>
